--- a/HomePilotAI/presentation/HomePilotAI_Hackathon_Deck.pptx
+++ b/HomePilotAI/presentation/HomePilotAI_Hackathon_Deck.pptx
@@ -3181,11 +3181,12 @@
           <a:noFill/>
         </p:spPr>
         <p:txBody>
-          <a:bodyPr wrap="none">
+          <a:bodyPr wrap="square">
             <a:spAutoFit/>
           </a:bodyPr>
           <a:lstStyle/>
           <a:p>
+            <a:pPr spcBef="25400" spcAft="25400"/>
             <a:r>
               <a:rPr sz="3000" b="1">
                 <a:solidFill>
@@ -3196,7 +3197,7 @@
             </a:r>
           </a:p>
           <a:p>
-            <a:pPr>
+            <a:pPr spcBef="25400" spcAft="25400">
               <a:defRPr sz="1600">
                 <a:solidFill>
                   <a:srgbClr val="1B2B2D"/>
@@ -3204,11 +3205,16 @@
               </a:defRPr>
             </a:pPr>
             <a:r>
+              <a:rPr sz="1400">
+                <a:solidFill>
+                  <a:srgbClr val="5A6E70"/>
+                </a:solidFill>
+              </a:rPr>
               <a:t>AI for Good: helping people make safer, fairer housing decisions.</a:t>
             </a:r>
           </a:p>
           <a:p>
-            <a:pPr>
+            <a:pPr spcBef="25400" spcAft="25400">
               <a:defRPr sz="1400">
                 <a:solidFill>
                   <a:srgbClr val="12605D"/>
@@ -3216,6 +3222,11 @@
               </a:defRPr>
             </a:pPr>
             <a:r>
+              <a:rPr sz="1100">
+                <a:solidFill>
+                  <a:srgbClr val="5A6E70"/>
+                </a:solidFill>
+              </a:rPr>
               <a:t>Hackathon MVP deck</a:t>
             </a:r>
           </a:p>
@@ -3248,7 +3259,7 @@
         <p:spPr>
           <a:xfrm>
             <a:off x="640080" y="365760"/>
-            <a:ext cx="10972800" cy="1097280"/>
+            <a:ext cx="10972800" cy="1005840"/>
           </a:xfrm>
           <a:prstGeom prst="rect">
             <a:avLst/>
@@ -3256,11 +3267,12 @@
           <a:noFill/>
         </p:spPr>
         <p:txBody>
-          <a:bodyPr wrap="none">
-            <a:spAutoFit/>
+          <a:bodyPr wrap="square">
+            <a:normAutofit/>
           </a:bodyPr>
           <a:lstStyle/>
           <a:p>
+            <a:pPr spcBef="12700" spcAft="12700"/>
             <a:r>
               <a:rPr sz="2800" b="1">
                 <a:solidFill>
@@ -3271,8 +3283,9 @@
             </a:r>
           </a:p>
           <a:p>
-            <a:r>
-              <a:rPr sz="1500">
+            <a:pPr spcBef="12700" spcAft="12700"/>
+            <a:r>
+              <a:rPr sz="1300">
                 <a:solidFill>
                   <a:srgbClr val="5A6E70"/>
                 </a:solidFill>
@@ -3290,7 +3303,7 @@
         </p:nvSpPr>
         <p:spPr>
           <a:xfrm>
-            <a:off x="731520" y="1554480"/>
+            <a:off x="731520" y="1600200"/>
             <a:ext cx="5120640" cy="4389120"/>
           </a:xfrm>
           <a:prstGeom prst="rect">
@@ -3300,11 +3313,11 @@
         </p:spPr>
         <p:txBody>
           <a:bodyPr wrap="square">
-            <a:spAutoFit/>
+            <a:normAutofit/>
           </a:bodyPr>
           <a:lstStyle/>
           <a:p>
-            <a:pPr>
+            <a:pPr spcBef="63500" spcAft="63500">
               <a:defRPr sz="2100">
                 <a:solidFill>
                   <a:srgbClr val="1B2B2D"/>
@@ -3312,11 +3325,16 @@
               </a:defRPr>
             </a:pPr>
             <a:r>
+              <a:rPr sz="1300">
+                <a:solidFill>
+                  <a:srgbClr val="1B2B2D"/>
+                </a:solidFill>
+              </a:rPr>
               <a:t>Renters and first-time buyers often do not know what they can safely afford.</a:t>
             </a:r>
           </a:p>
           <a:p>
-            <a:pPr>
+            <a:pPr spcBef="63500" spcAft="63500">
               <a:defRPr sz="2100">
                 <a:solidFill>
                   <a:srgbClr val="1B2B2D"/>
@@ -3324,11 +3342,16 @@
               </a:defRPr>
             </a:pPr>
             <a:r>
+              <a:rPr sz="1300">
+                <a:solidFill>
+                  <a:srgbClr val="1B2B2D"/>
+                </a:solidFill>
+              </a:rPr>
               <a:t>Grant and assistance programs are hard to discover and even harder to compare.</a:t>
             </a:r>
           </a:p>
           <a:p>
-            <a:pPr>
+            <a:pPr spcBef="63500" spcAft="63500">
               <a:defRPr sz="2100">
                 <a:solidFill>
                   <a:srgbClr val="1B2B2D"/>
@@ -3336,11 +3359,16 @@
               </a:defRPr>
             </a:pPr>
             <a:r>
+              <a:rPr sz="1300">
+                <a:solidFill>
+                  <a:srgbClr val="1B2B2D"/>
+                </a:solidFill>
+              </a:rPr>
               <a:t>Listing platforms show inventory, but not whether a home is realistic for a specific budget and household.</a:t>
             </a:r>
           </a:p>
           <a:p>
-            <a:pPr>
+            <a:pPr spcBef="63500" spcAft="63500">
               <a:defRPr sz="2100">
                 <a:solidFill>
                   <a:srgbClr val="1B2B2D"/>
@@ -3348,6 +3376,11 @@
               </a:defRPr>
             </a:pPr>
             <a:r>
+              <a:rPr sz="1300">
+                <a:solidFill>
+                  <a:srgbClr val="1B2B2D"/>
+                </a:solidFill>
+              </a:rPr>
               <a:t>That creates wasted applications, delayed decisions, and less equitable access to stable housing.</a:t>
             </a:r>
           </a:p>
@@ -3404,7 +3437,7 @@
         <p:spPr>
           <a:xfrm>
             <a:off x="640080" y="365760"/>
-            <a:ext cx="10972800" cy="1097280"/>
+            <a:ext cx="10972800" cy="1005840"/>
           </a:xfrm>
           <a:prstGeom prst="rect">
             <a:avLst/>
@@ -3412,11 +3445,12 @@
           <a:noFill/>
         </p:spPr>
         <p:txBody>
-          <a:bodyPr wrap="none">
-            <a:spAutoFit/>
+          <a:bodyPr wrap="square">
+            <a:normAutofit/>
           </a:bodyPr>
           <a:lstStyle/>
           <a:p>
+            <a:pPr spcBef="12700" spcAft="12700"/>
             <a:r>
               <a:rPr sz="2800" b="1">
                 <a:solidFill>
@@ -3427,8 +3461,9 @@
             </a:r>
           </a:p>
           <a:p>
-            <a:r>
-              <a:rPr sz="1500">
+            <a:pPr spcBef="12700" spcAft="12700"/>
+            <a:r>
+              <a:rPr sz="1300">
                 <a:solidFill>
                   <a:srgbClr val="5A6E70"/>
                 </a:solidFill>
@@ -3446,7 +3481,7 @@
         </p:nvSpPr>
         <p:spPr>
           <a:xfrm>
-            <a:off x="731520" y="1554480"/>
+            <a:off x="731520" y="1600200"/>
             <a:ext cx="5486400" cy="4389120"/>
           </a:xfrm>
           <a:prstGeom prst="rect">
@@ -3456,11 +3491,11 @@
         </p:spPr>
         <p:txBody>
           <a:bodyPr wrap="square">
-            <a:spAutoFit/>
+            <a:normAutofit/>
           </a:bodyPr>
           <a:lstStyle/>
           <a:p>
-            <a:pPr>
+            <a:pPr spcBef="63500" spcAft="63500">
               <a:defRPr sz="2100">
                 <a:solidFill>
                   <a:srgbClr val="1B2B2D"/>
@@ -3468,11 +3503,16 @@
               </a:defRPr>
             </a:pPr>
             <a:r>
+              <a:rPr sz="1300">
+                <a:solidFill>
+                  <a:srgbClr val="1B2B2D"/>
+                </a:solidFill>
+              </a:rPr>
               <a:t>Users create a profile with income, employment, household size, location, credit estimate, and rent-or-buy preference.</a:t>
             </a:r>
           </a:p>
           <a:p>
-            <a:pPr>
+            <a:pPr spcBef="63500" spcAft="63500">
               <a:defRPr sz="2100">
                 <a:solidFill>
                   <a:srgbClr val="1B2B2D"/>
@@ -3480,11 +3520,16 @@
               </a:defRPr>
             </a:pPr>
             <a:r>
+              <a:rPr sz="1300">
+                <a:solidFill>
+                  <a:srgbClr val="1B2B2D"/>
+                </a:solidFill>
+              </a:rPr>
               <a:t>AI agents estimate affordability, rank listings, surface grants, and score mortgage readiness.</a:t>
             </a:r>
           </a:p>
           <a:p>
-            <a:pPr>
+            <a:pPr spcBef="63500" spcAft="63500">
               <a:defRPr sz="2100">
                 <a:solidFill>
                   <a:srgbClr val="1B2B2D"/>
@@ -3492,6 +3537,11 @@
               </a:defRPr>
             </a:pPr>
             <a:r>
+              <a:rPr sz="1300">
+                <a:solidFill>
+                  <a:srgbClr val="1B2B2D"/>
+                </a:solidFill>
+              </a:rPr>
               <a:t>The dashboard gives a fast answer to the question: What can I actually pursue right now?</a:t>
             </a:r>
           </a:p>
@@ -3535,7 +3585,9 @@
           </a:fontRef>
         </p:style>
         <p:txBody>
-          <a:bodyPr rtlCol="0" anchor="ctr"/>
+          <a:bodyPr rtlCol="0" anchor="ctr" wrap="square">
+            <a:normAutofit/>
+          </a:bodyPr>
           <a:lstStyle/>
           <a:p>
             <a:pPr algn="ctr">
@@ -3546,6 +3598,11 @@
               </a:defRPr>
             </a:pPr>
             <a:r>
+              <a:rPr sz="1200" b="1">
+                <a:solidFill>
+                  <a:srgbClr val="FFFFFF"/>
+                </a:solidFill>
+              </a:rPr>
               <a:t>Affordability</a:t>
             </a:r>
           </a:p>
@@ -3589,7 +3646,9 @@
           </a:fontRef>
         </p:style>
         <p:txBody>
-          <a:bodyPr rtlCol="0" anchor="ctr"/>
+          <a:bodyPr rtlCol="0" anchor="ctr" wrap="square">
+            <a:normAutofit/>
+          </a:bodyPr>
           <a:lstStyle/>
           <a:p>
             <a:pPr algn="ctr">
@@ -3600,6 +3659,11 @@
               </a:defRPr>
             </a:pPr>
             <a:r>
+              <a:rPr sz="1200" b="1">
+                <a:solidFill>
+                  <a:srgbClr val="FFFFFF"/>
+                </a:solidFill>
+              </a:rPr>
               <a:t>Grants</a:t>
             </a:r>
           </a:p>
@@ -3643,7 +3707,9 @@
           </a:fontRef>
         </p:style>
         <p:txBody>
-          <a:bodyPr rtlCol="0" anchor="ctr"/>
+          <a:bodyPr rtlCol="0" anchor="ctr" wrap="square">
+            <a:normAutofit/>
+          </a:bodyPr>
           <a:lstStyle/>
           <a:p>
             <a:pPr algn="ctr">
@@ -3654,6 +3720,11 @@
               </a:defRPr>
             </a:pPr>
             <a:r>
+              <a:rPr sz="1200" b="1">
+                <a:solidFill>
+                  <a:srgbClr val="FFFFFF"/>
+                </a:solidFill>
+              </a:rPr>
               <a:t>Recommendations</a:t>
             </a:r>
           </a:p>
@@ -3697,7 +3768,9 @@
           </a:fontRef>
         </p:style>
         <p:txBody>
-          <a:bodyPr rtlCol="0" anchor="ctr"/>
+          <a:bodyPr rtlCol="0" anchor="ctr" wrap="square">
+            <a:normAutofit/>
+          </a:bodyPr>
           <a:lstStyle/>
           <a:p>
             <a:pPr algn="ctr">
@@ -3708,6 +3781,11 @@
               </a:defRPr>
             </a:pPr>
             <a:r>
+              <a:rPr sz="1200" b="1">
+                <a:solidFill>
+                  <a:srgbClr val="FFFFFF"/>
+                </a:solidFill>
+              </a:rPr>
               <a:t>Mortgage</a:t>
             </a:r>
           </a:p>
@@ -3740,7 +3818,7 @@
         <p:spPr>
           <a:xfrm>
             <a:off x="640080" y="365760"/>
-            <a:ext cx="10972800" cy="1097280"/>
+            <a:ext cx="10972800" cy="1005840"/>
           </a:xfrm>
           <a:prstGeom prst="rect">
             <a:avLst/>
@@ -3748,11 +3826,12 @@
           <a:noFill/>
         </p:spPr>
         <p:txBody>
-          <a:bodyPr wrap="none">
-            <a:spAutoFit/>
+          <a:bodyPr wrap="square">
+            <a:normAutofit/>
           </a:bodyPr>
           <a:lstStyle/>
           <a:p>
+            <a:pPr spcBef="12700" spcAft="12700"/>
             <a:r>
               <a:rPr sz="2800" b="1">
                 <a:solidFill>
@@ -3763,8 +3842,9 @@
             </a:r>
           </a:p>
           <a:p>
-            <a:r>
-              <a:rPr sz="1500">
+            <a:pPr spcBef="12700" spcAft="12700"/>
+            <a:r>
+              <a:rPr sz="1300">
                 <a:solidFill>
                   <a:srgbClr val="5A6E70"/>
                 </a:solidFill>
@@ -3782,7 +3862,7 @@
         </p:nvSpPr>
         <p:spPr>
           <a:xfrm>
-            <a:off x="731520" y="1554480"/>
+            <a:off x="731520" y="1600200"/>
             <a:ext cx="10607040" cy="4389120"/>
           </a:xfrm>
           <a:prstGeom prst="rect">
@@ -3792,11 +3872,11 @@
         </p:spPr>
         <p:txBody>
           <a:bodyPr wrap="square">
-            <a:spAutoFit/>
+            <a:normAutofit/>
           </a:bodyPr>
           <a:lstStyle/>
           <a:p>
-            <a:pPr>
+            <a:pPr spcBef="63500" spcAft="63500">
               <a:defRPr sz="2100">
                 <a:solidFill>
                   <a:srgbClr val="1B2B2D"/>
@@ -3804,11 +3884,16 @@
               </a:defRPr>
             </a:pPr>
             <a:r>
+              <a:rPr sz="1300">
+                <a:solidFill>
+                  <a:srgbClr val="1B2B2D"/>
+                </a:solidFill>
+              </a:rPr>
               <a:t>We focus on housing equity, not convenience for its own sake.</a:t>
             </a:r>
           </a:p>
           <a:p>
-            <a:pPr>
+            <a:pPr spcBef="63500" spcAft="63500">
               <a:defRPr sz="2100">
                 <a:solidFill>
                   <a:srgbClr val="1B2B2D"/>
@@ -3816,11 +3901,16 @@
               </a:defRPr>
             </a:pPr>
             <a:r>
+              <a:rPr sz="1300">
+                <a:solidFill>
+                  <a:srgbClr val="1B2B2D"/>
+                </a:solidFill>
+              </a:rPr>
               <a:t>The AI helps people avoid unaffordable choices before they invest time, money, and emotional energy.</a:t>
             </a:r>
           </a:p>
           <a:p>
-            <a:pPr>
+            <a:pPr spcBef="63500" spcAft="63500">
               <a:defRPr sz="2100">
                 <a:solidFill>
                   <a:srgbClr val="1B2B2D"/>
@@ -3828,11 +3918,16 @@
               </a:defRPr>
             </a:pPr>
             <a:r>
+              <a:rPr sz="1300">
+                <a:solidFill>
+                  <a:srgbClr val="1B2B2D"/>
+                </a:solidFill>
+              </a:rPr>
               <a:t>It improves access to grants and assistance that users might otherwise never find.</a:t>
             </a:r>
           </a:p>
           <a:p>
-            <a:pPr>
+            <a:pPr spcBef="63500" spcAft="63500">
               <a:defRPr sz="2100">
                 <a:solidFill>
                   <a:srgbClr val="1B2B2D"/>
@@ -3840,6 +3935,11 @@
               </a:defRPr>
             </a:pPr>
             <a:r>
+              <a:rPr sz="1300">
+                <a:solidFill>
+                  <a:srgbClr val="1B2B2D"/>
+                </a:solidFill>
+              </a:rPr>
               <a:t>The outcome is clearer, fairer, and more informed housing decisions for everyday households.</a:t>
             </a:r>
           </a:p>
@@ -3872,7 +3972,7 @@
         <p:spPr>
           <a:xfrm>
             <a:off x="640080" y="365760"/>
-            <a:ext cx="10972800" cy="1097280"/>
+            <a:ext cx="10972800" cy="1005840"/>
           </a:xfrm>
           <a:prstGeom prst="rect">
             <a:avLst/>
@@ -3880,11 +3980,12 @@
           <a:noFill/>
         </p:spPr>
         <p:txBody>
-          <a:bodyPr wrap="none">
-            <a:spAutoFit/>
+          <a:bodyPr wrap="square">
+            <a:normAutofit/>
           </a:bodyPr>
           <a:lstStyle/>
           <a:p>
+            <a:pPr spcBef="12700" spcAft="12700"/>
             <a:r>
               <a:rPr sz="2800" b="1">
                 <a:solidFill>
@@ -3895,8 +3996,9 @@
             </a:r>
           </a:p>
           <a:p>
-            <a:r>
-              <a:rPr sz="1500">
+            <a:pPr spcBef="12700" spcAft="12700"/>
+            <a:r>
+              <a:rPr sz="1300">
                 <a:solidFill>
                   <a:srgbClr val="5A6E70"/>
                 </a:solidFill>
@@ -3914,7 +4016,7 @@
         </p:nvSpPr>
         <p:spPr>
           <a:xfrm>
-            <a:off x="731520" y="1554480"/>
+            <a:off x="731520" y="1600200"/>
             <a:ext cx="5852160" cy="4389120"/>
           </a:xfrm>
           <a:prstGeom prst="rect">
@@ -3924,11 +4026,11 @@
         </p:spPr>
         <p:txBody>
           <a:bodyPr wrap="square">
-            <a:spAutoFit/>
+            <a:normAutofit/>
           </a:bodyPr>
           <a:lstStyle/>
           <a:p>
-            <a:pPr>
+            <a:pPr spcBef="63500" spcAft="63500">
               <a:defRPr sz="2100">
                 <a:solidFill>
                   <a:srgbClr val="1B2B2D"/>
@@ -3936,11 +4038,16 @@
               </a:defRPr>
             </a:pPr>
             <a:r>
+              <a:rPr sz="1300">
+                <a:solidFill>
+                  <a:srgbClr val="1B2B2D"/>
+                </a:solidFill>
+              </a:rPr>
               <a:t>1. Log in with the seeded demo account or use offline fallback mode if the backend is unavailable.</a:t>
             </a:r>
           </a:p>
           <a:p>
-            <a:pPr>
+            <a:pPr spcBef="63500" spcAft="63500">
               <a:defRPr sz="2100">
                 <a:solidFill>
                   <a:srgbClr val="1B2B2D"/>
@@ -3948,11 +4055,16 @@
               </a:defRPr>
             </a:pPr>
             <a:r>
+              <a:rPr sz="1300">
+                <a:solidFill>
+                  <a:srgbClr val="1B2B2D"/>
+                </a:solidFill>
+              </a:rPr>
               <a:t>2. Review the dashboard for rent range, purchase range, grants, and top listings.</a:t>
             </a:r>
           </a:p>
           <a:p>
-            <a:pPr>
+            <a:pPr spcBef="63500" spcAft="63500">
               <a:defRPr sz="2100">
                 <a:solidFill>
                   <a:srgbClr val="1B2B2D"/>
@@ -3960,11 +4072,16 @@
               </a:defRPr>
             </a:pPr>
             <a:r>
+              <a:rPr sz="1300">
+                <a:solidFill>
+                  <a:srgbClr val="1B2B2D"/>
+                </a:solidFill>
+              </a:rPr>
               <a:t>3. Open recommendations and listings to compare budget fit and match scores.</a:t>
             </a:r>
           </a:p>
           <a:p>
-            <a:pPr>
+            <a:pPr spcBef="63500" spcAft="63500">
               <a:defRPr sz="2100">
                 <a:solidFill>
                   <a:srgbClr val="1B2B2D"/>
@@ -3972,6 +4089,11 @@
               </a:defRPr>
             </a:pPr>
             <a:r>
+              <a:rPr sz="1300">
+                <a:solidFill>
+                  <a:srgbClr val="1B2B2D"/>
+                </a:solidFill>
+              </a:rPr>
               <a:t>4. Check the mortgage estimate and grant eligibility views for next-step guidance.</a:t>
             </a:r>
           </a:p>
@@ -4028,7 +4150,7 @@
         <p:spPr>
           <a:xfrm>
             <a:off x="640080" y="365760"/>
-            <a:ext cx="10972800" cy="1097280"/>
+            <a:ext cx="10972800" cy="1005840"/>
           </a:xfrm>
           <a:prstGeom prst="rect">
             <a:avLst/>
@@ -4036,11 +4158,12 @@
           <a:noFill/>
         </p:spPr>
         <p:txBody>
-          <a:bodyPr wrap="none">
-            <a:spAutoFit/>
+          <a:bodyPr wrap="square">
+            <a:normAutofit/>
           </a:bodyPr>
           <a:lstStyle/>
           <a:p>
+            <a:pPr spcBef="12700" spcAft="12700"/>
             <a:r>
               <a:rPr sz="2800" b="1">
                 <a:solidFill>
@@ -4051,8 +4174,9 @@
             </a:r>
           </a:p>
           <a:p>
-            <a:r>
-              <a:rPr sz="1500">
+            <a:pPr spcBef="12700" spcAft="12700"/>
+            <a:r>
+              <a:rPr sz="1300">
                 <a:solidFill>
                   <a:srgbClr val="5A6E70"/>
                 </a:solidFill>
@@ -4070,7 +4194,7 @@
         </p:nvSpPr>
         <p:spPr>
           <a:xfrm>
-            <a:off x="731520" y="1554480"/>
+            <a:off x="731520" y="1600200"/>
             <a:ext cx="5669280" cy="4389120"/>
           </a:xfrm>
           <a:prstGeom prst="rect">
@@ -4080,11 +4204,11 @@
         </p:spPr>
         <p:txBody>
           <a:bodyPr wrap="square">
-            <a:spAutoFit/>
+            <a:normAutofit/>
           </a:bodyPr>
           <a:lstStyle/>
           <a:p>
-            <a:pPr>
+            <a:pPr spcBef="63500" spcAft="63500">
               <a:defRPr sz="2100">
                 <a:solidFill>
                   <a:srgbClr val="1B2B2D"/>
@@ -4092,11 +4216,16 @@
               </a:defRPr>
             </a:pPr>
             <a:r>
+              <a:rPr sz="1300">
+                <a:solidFill>
+                  <a:srgbClr val="1B2B2D"/>
+                </a:solidFill>
+              </a:rPr>
               <a:t>Flutter frontend with login, profile setup, dashboard, listings, grants, saved homes, and mortgage views.</a:t>
             </a:r>
           </a:p>
           <a:p>
-            <a:pPr>
+            <a:pPr spcBef="63500" spcAft="63500">
               <a:defRPr sz="2100">
                 <a:solidFill>
                   <a:srgbClr val="1B2B2D"/>
@@ -4104,11 +4233,16 @@
               </a:defRPr>
             </a:pPr>
             <a:r>
+              <a:rPr sz="1300">
+                <a:solidFill>
+                  <a:srgbClr val="1B2B2D"/>
+                </a:solidFill>
+              </a:rPr>
               <a:t>Spring Boot backend with JWT auth, REST APIs, repository/service architecture, and seeded datasets.</a:t>
             </a:r>
           </a:p>
           <a:p>
-            <a:pPr>
+            <a:pPr spcBef="63500" spcAft="63500">
               <a:defRPr sz="2100">
                 <a:solidFill>
                   <a:srgbClr val="1B2B2D"/>
@@ -4116,11 +4250,16 @@
               </a:defRPr>
             </a:pPr>
             <a:r>
+              <a:rPr sz="1300">
+                <a:solidFill>
+                  <a:srgbClr val="1B2B2D"/>
+                </a:solidFill>
+              </a:rPr>
               <a:t>Modular agent connectors for affordability, grants, recommendations, and mortgage estimation.</a:t>
             </a:r>
           </a:p>
           <a:p>
-            <a:pPr>
+            <a:pPr spcBef="63500" spcAft="63500">
               <a:defRPr sz="2100">
                 <a:solidFill>
                   <a:srgbClr val="1B2B2D"/>
@@ -4128,6 +4267,11 @@
               </a:defRPr>
             </a:pPr>
             <a:r>
+              <a:rPr sz="1300">
+                <a:solidFill>
+                  <a:srgbClr val="1B2B2D"/>
+                </a:solidFill>
+              </a:rPr>
               <a:t>Designed to plug into Google Maps, Plaid, Zillow/Realtor data, and Vertex AI or Gemini later.</a:t>
             </a:r>
           </a:p>
@@ -4171,7 +4315,9 @@
           </a:fontRef>
         </p:style>
         <p:txBody>
-          <a:bodyPr rtlCol="0" anchor="ctr"/>
+          <a:bodyPr rtlCol="0" anchor="ctr" wrap="square">
+            <a:normAutofit/>
+          </a:bodyPr>
           <a:lstStyle/>
           <a:p>
             <a:pPr algn="ctr">
@@ -4182,6 +4328,11 @@
               </a:defRPr>
             </a:pPr>
             <a:r>
+              <a:rPr sz="1200" b="1">
+                <a:solidFill>
+                  <a:srgbClr val="FFFFFF"/>
+                </a:solidFill>
+              </a:rPr>
               <a:t>Flutter App</a:t>
             </a:r>
           </a:p>
@@ -4225,7 +4376,9 @@
           </a:fontRef>
         </p:style>
         <p:txBody>
-          <a:bodyPr rtlCol="0" anchor="ctr"/>
+          <a:bodyPr rtlCol="0" anchor="ctr" wrap="square">
+            <a:normAutofit/>
+          </a:bodyPr>
           <a:lstStyle/>
           <a:p>
             <a:pPr algn="ctr">
@@ -4236,6 +4389,11 @@
               </a:defRPr>
             </a:pPr>
             <a:r>
+              <a:rPr sz="1200" b="1">
+                <a:solidFill>
+                  <a:srgbClr val="FFFFFF"/>
+                </a:solidFill>
+              </a:rPr>
               <a:t>Spring Boot API</a:t>
             </a:r>
           </a:p>
@@ -4279,7 +4437,9 @@
           </a:fontRef>
         </p:style>
         <p:txBody>
-          <a:bodyPr rtlCol="0" anchor="ctr"/>
+          <a:bodyPr rtlCol="0" anchor="ctr" wrap="square">
+            <a:normAutofit/>
+          </a:bodyPr>
           <a:lstStyle/>
           <a:p>
             <a:pPr algn="ctr">
@@ -4290,6 +4450,11 @@
               </a:defRPr>
             </a:pPr>
             <a:r>
+              <a:rPr sz="1200" b="1">
+                <a:solidFill>
+                  <a:srgbClr val="FFFFFF"/>
+                </a:solidFill>
+              </a:rPr>
               <a:t>Agent Connectors</a:t>
             </a:r>
           </a:p>
@@ -4333,7 +4498,9 @@
           </a:fontRef>
         </p:style>
         <p:txBody>
-          <a:bodyPr rtlCol="0" anchor="ctr"/>
+          <a:bodyPr rtlCol="0" anchor="ctr" wrap="square">
+            <a:normAutofit/>
+          </a:bodyPr>
           <a:lstStyle/>
           <a:p>
             <a:pPr algn="ctr">
@@ -4344,11 +4511,108 @@
               </a:defRPr>
             </a:pPr>
             <a:r>
+              <a:rPr sz="1200" b="1">
+                <a:solidFill>
+                  <a:srgbClr val="FFFFFF"/>
+                </a:solidFill>
+              </a:rPr>
               <a:t>Future APIs</a:t>
             </a:r>
           </a:p>
         </p:txBody>
       </p:sp>
+      <p:cxnSp>
+        <p:nvCxnSpPr>
+          <p:cNvPr id="99" name="Connector"/>
+          <p:cNvCxnSpPr/>
+          <p:nvPr/>
+        </p:nvCxnSpPr>
+        <p:spPr>
+          <a:xfrm>
+            <a:off x="8595360" y="2194560"/>
+            <a:ext cx="320040" cy="0"/>
+          </a:xfrm>
+          <a:prstGeom prst="straightConnector1">
+            <a:avLst/>
+          </a:prstGeom>
+          <a:ln w="19050">
+            <a:solidFill>
+              <a:srgbClr val="2A9D8F"/>
+            </a:solidFill>
+            <a:headEnd type="none"/>
+            <a:tailEnd type="arrow"/>
+          </a:ln>
+        </p:spPr>
+      </p:cxnSp>
+      <p:cxnSp>
+        <p:nvCxnSpPr>
+          <p:cNvPr id="99" name="Connector"/>
+          <p:cNvCxnSpPr/>
+          <p:nvPr/>
+        </p:nvCxnSpPr>
+        <p:spPr>
+          <a:xfrm>
+            <a:off x="7589520" y="2651760"/>
+            <a:ext cx="0" cy="502920"/>
+          </a:xfrm>
+          <a:prstGeom prst="straightConnector1">
+            <a:avLst/>
+          </a:prstGeom>
+          <a:ln w="19050">
+            <a:solidFill>
+              <a:srgbClr val="2A9D8F"/>
+            </a:solidFill>
+            <a:headEnd type="none"/>
+            <a:tailEnd type="arrow"/>
+          </a:ln>
+        </p:spPr>
+      </p:cxnSp>
+      <p:cxnSp>
+        <p:nvCxnSpPr>
+          <p:cNvPr id="99" name="Connector"/>
+          <p:cNvCxnSpPr/>
+          <p:nvPr/>
+        </p:nvCxnSpPr>
+        <p:spPr>
+          <a:xfrm>
+            <a:off x="8595360" y="3611880"/>
+            <a:ext cx="320040" cy="0"/>
+          </a:xfrm>
+          <a:prstGeom prst="straightConnector1">
+            <a:avLst/>
+          </a:prstGeom>
+          <a:ln w="19050">
+            <a:solidFill>
+              <a:srgbClr val="2A9D8F"/>
+            </a:solidFill>
+            <a:headEnd type="none"/>
+            <a:tailEnd type="arrow"/>
+          </a:ln>
+        </p:spPr>
+      </p:cxnSp>
+      <p:cxnSp>
+        <p:nvCxnSpPr>
+          <p:cNvPr id="99" name="Connector"/>
+          <p:cNvCxnSpPr/>
+          <p:nvPr/>
+        </p:nvCxnSpPr>
+        <p:spPr>
+          <a:xfrm>
+            <a:off x="9921240" y="2651760"/>
+            <a:ext cx="0" cy="502920"/>
+          </a:xfrm>
+          <a:prstGeom prst="straightConnector1">
+            <a:avLst/>
+          </a:prstGeom>
+          <a:ln w="19050">
+            <a:solidFill>
+              <a:srgbClr val="2A9D8F"/>
+            </a:solidFill>
+            <a:headEnd type="none"/>
+            <a:tailEnd type="arrow"/>
+          </a:ln>
+        </p:spPr>
+      </p:cxnSp>
     </p:spTree>
   </p:cSld>
   <p:clrMapOvr>
@@ -4376,7 +4640,7 @@
         <p:spPr>
           <a:xfrm>
             <a:off x="640080" y="365760"/>
-            <a:ext cx="10972800" cy="1097280"/>
+            <a:ext cx="10972800" cy="1005840"/>
           </a:xfrm>
           <a:prstGeom prst="rect">
             <a:avLst/>
@@ -4384,11 +4648,12 @@
           <a:noFill/>
         </p:spPr>
         <p:txBody>
-          <a:bodyPr wrap="none">
-            <a:spAutoFit/>
+          <a:bodyPr wrap="square">
+            <a:normAutofit/>
           </a:bodyPr>
           <a:lstStyle/>
           <a:p>
+            <a:pPr spcBef="12700" spcAft="12700"/>
             <a:r>
               <a:rPr sz="2800" b="1">
                 <a:solidFill>
@@ -4399,8 +4664,9 @@
             </a:r>
           </a:p>
           <a:p>
-            <a:r>
-              <a:rPr sz="1500">
+            <a:pPr spcBef="12700" spcAft="12700"/>
+            <a:r>
+              <a:rPr sz="1300">
                 <a:solidFill>
                   <a:srgbClr val="5A6E70"/>
                 </a:solidFill>
@@ -4418,7 +4684,7 @@
         </p:nvSpPr>
         <p:spPr>
           <a:xfrm>
-            <a:off x="731520" y="1554480"/>
+            <a:off x="731520" y="1600200"/>
             <a:ext cx="10515600" cy="4389120"/>
           </a:xfrm>
           <a:prstGeom prst="rect">
@@ -4428,11 +4694,11 @@
         </p:spPr>
         <p:txBody>
           <a:bodyPr wrap="square">
-            <a:spAutoFit/>
+            <a:normAutofit/>
           </a:bodyPr>
           <a:lstStyle/>
           <a:p>
-            <a:pPr>
+            <a:pPr spcBef="63500" spcAft="63500">
               <a:defRPr sz="2100">
                 <a:solidFill>
                   <a:srgbClr val="1B2B2D"/>
@@ -4440,11 +4706,16 @@
               </a:defRPr>
             </a:pPr>
             <a:r>
+              <a:rPr sz="1300">
+                <a:solidFill>
+                  <a:srgbClr val="1B2B2D"/>
+                </a:solidFill>
+              </a:rPr>
               <a:t>Seeded demo credentials: demo@homepilot.ai / HomePilot123!</a:t>
             </a:r>
           </a:p>
           <a:p>
-            <a:pPr>
+            <a:pPr spcBef="63500" spcAft="63500">
               <a:defRPr sz="2100">
                 <a:solidFill>
                   <a:srgbClr val="1B2B2D"/>
@@ -4452,11 +4723,16 @@
               </a:defRPr>
             </a:pPr>
             <a:r>
+              <a:rPr sz="1300">
+                <a:solidFill>
+                  <a:srgbClr val="1B2B2D"/>
+                </a:solidFill>
+              </a:rPr>
               <a:t>Backend defaults to embedded H2 for local startup, with PostgreSQL still supported for deployment.</a:t>
             </a:r>
           </a:p>
           <a:p>
-            <a:pPr>
+            <a:pPr spcBef="63500" spcAft="63500">
               <a:defRPr sz="2100">
                 <a:solidFill>
                   <a:srgbClr val="1B2B2D"/>
@@ -4464,11 +4740,16 @@
               </a:defRPr>
             </a:pPr>
             <a:r>
+              <a:rPr sz="1300">
+                <a:solidFill>
+                  <a:srgbClr val="1B2B2D"/>
+                </a:solidFill>
+              </a:rPr>
               <a:t>Flutter automatically uses platform-aware local API hosts for Android, iOS, macOS, and web.</a:t>
             </a:r>
           </a:p>
           <a:p>
-            <a:pPr>
+            <a:pPr spcBef="63500" spcAft="63500">
               <a:defRPr sz="2100">
                 <a:solidFill>
                   <a:srgbClr val="1B2B2D"/>
@@ -4476,6 +4757,11 @@
               </a:defRPr>
             </a:pPr>
             <a:r>
+              <a:rPr sz="1300">
+                <a:solidFill>
+                  <a:srgbClr val="1B2B2D"/>
+                </a:solidFill>
+              </a:rPr>
               <a:t>If the API is temporarily unreachable, the demo account switches to local sample data for a smooth walkthrough.</a:t>
             </a:r>
           </a:p>
@@ -4508,7 +4794,7 @@
         <p:spPr>
           <a:xfrm>
             <a:off x="640080" y="365760"/>
-            <a:ext cx="10972800" cy="1097280"/>
+            <a:ext cx="10972800" cy="1005840"/>
           </a:xfrm>
           <a:prstGeom prst="rect">
             <a:avLst/>
@@ -4516,11 +4802,12 @@
           <a:noFill/>
         </p:spPr>
         <p:txBody>
-          <a:bodyPr wrap="none">
-            <a:spAutoFit/>
+          <a:bodyPr wrap="square">
+            <a:normAutofit/>
           </a:bodyPr>
           <a:lstStyle/>
           <a:p>
+            <a:pPr spcBef="12700" spcAft="12700"/>
             <a:r>
               <a:rPr sz="2800" b="1">
                 <a:solidFill>
@@ -4531,8 +4818,9 @@
             </a:r>
           </a:p>
           <a:p>
-            <a:r>
-              <a:rPr sz="1500">
+            <a:pPr spcBef="12700" spcAft="12700"/>
+            <a:r>
+              <a:rPr sz="1300">
                 <a:solidFill>
                   <a:srgbClr val="5A6E70"/>
                 </a:solidFill>
@@ -4550,8 +4838,8 @@
         </p:nvSpPr>
         <p:spPr>
           <a:xfrm>
-            <a:off x="731520" y="1554480"/>
-            <a:ext cx="10515600" cy="4389120"/>
+            <a:off x="731520" y="1600200"/>
+            <a:ext cx="10515600" cy="2560320"/>
           </a:xfrm>
           <a:prstGeom prst="rect">
             <a:avLst/>
@@ -4560,11 +4848,11 @@
         </p:spPr>
         <p:txBody>
           <a:bodyPr wrap="square">
-            <a:spAutoFit/>
+            <a:normAutofit/>
           </a:bodyPr>
           <a:lstStyle/>
           <a:p>
-            <a:pPr>
+            <a:pPr spcBef="63500" spcAft="63500">
               <a:defRPr sz="2100">
                 <a:solidFill>
                   <a:srgbClr val="1B2B2D"/>
@@ -4572,11 +4860,16 @@
               </a:defRPr>
             </a:pPr>
             <a:r>
+              <a:rPr sz="1300">
+                <a:solidFill>
+                  <a:srgbClr val="1B2B2D"/>
+                </a:solidFill>
+              </a:rPr>
               <a:t>Immediate use cases: hackathon demo, research tool, civic-tech prototype, or prop-tech portfolio piece.</a:t>
             </a:r>
           </a:p>
           <a:p>
-            <a:pPr>
+            <a:pPr spcBef="63500" spcAft="63500">
               <a:defRPr sz="2100">
                 <a:solidFill>
                   <a:srgbClr val="1B2B2D"/>
@@ -4584,11 +4877,16 @@
               </a:defRPr>
             </a:pPr>
             <a:r>
+              <a:rPr sz="1300">
+                <a:solidFill>
+                  <a:srgbClr val="1B2B2D"/>
+                </a:solidFill>
+              </a:rPr>
               <a:t>Next upgrades: live listings, geospatial search, bank data, document parsing, and grant-policy expansion.</a:t>
             </a:r>
           </a:p>
           <a:p>
-            <a:pPr>
+            <a:pPr spcBef="63500" spcAft="63500">
               <a:defRPr sz="2100">
                 <a:solidFill>
                   <a:srgbClr val="1B2B2D"/>
@@ -4596,6 +4894,11 @@
               </a:defRPr>
             </a:pPr>
             <a:r>
+              <a:rPr sz="1300">
+                <a:solidFill>
+                  <a:srgbClr val="1B2B2D"/>
+                </a:solidFill>
+              </a:rPr>
               <a:t>North star: give more people a trustworthy path to stable housing.</a:t>
             </a:r>
           </a:p>
@@ -4609,21 +4912,23 @@
         </p:nvSpPr>
         <p:spPr>
           <a:xfrm>
-            <a:off x="731520" y="5120640"/>
-            <a:ext cx="10424160" cy="731520"/>
+            <a:off x="640080" y="4343400"/>
+            <a:ext cx="10881360" cy="822960"/>
           </a:xfrm>
           <a:prstGeom prst="rect">
             <a:avLst/>
           </a:prstGeom>
-          <a:noFill/>
-        </p:spPr>
-        <p:txBody>
-          <a:bodyPr wrap="none">
-            <a:spAutoFit/>
+          <a:solidFill>
+            <a:srgbClr val="E1EFE9"/>
+          </a:solidFill>
+        </p:spPr>
+        <p:txBody>
+          <a:bodyPr wrap="square">
+            <a:normAutofit/>
           </a:bodyPr>
           <a:lstStyle/>
           <a:p>
-            <a:pPr algn="ctr">
+            <a:pPr algn="ctr" spcBef="76200" spcAft="76200">
               <a:defRPr sz="2400" b="1">
                 <a:solidFill>
                   <a:srgbClr val="12605D"/>
@@ -4631,6 +4936,11 @@
               </a:defRPr>
             </a:pPr>
             <a:r>
+              <a:rPr sz="1400" b="1">
+                <a:solidFill>
+                  <a:srgbClr val="1B2B2D"/>
+                </a:solidFill>
+              </a:rPr>
               <a:t>HomePilot AI makes housing guidance more accessible, actionable, and equitable.</a:t>
             </a:r>
           </a:p>

--- a/HomePilotAI/presentation/HomePilotAI_Hackathon_Deck.pptx
+++ b/HomePilotAI/presentation/HomePilotAI_Hackathon_Deck.pptx
@@ -13,6 +13,7 @@
     <p:sldId id="261" r:id="rId12"/>
     <p:sldId id="262" r:id="rId13"/>
     <p:sldId id="263" r:id="rId14"/>
+    <p:sldId id="264" r:id="rId15"/>
   </p:sldIdLst>
   <p:sldSz cx="12191695" cy="6858000" type="screen4x3"/>
   <p:notesSz cx="6858000" cy="9144000"/>
@@ -4942,6 +4943,509 @@
                 </a:solidFill>
               </a:rPr>
               <a:t>HomePilot AI makes housing guidance more accessible, actionable, and equitable.</a:t>
+            </a:r>
+          </a:p>
+        </p:txBody>
+      </p:sp>
+    </p:spTree>
+  </p:cSld>
+  <p:clrMapOvr>
+    <a:masterClrMapping/>
+  </p:clrMapOvr>
+</p:sld>
+</file>
+
+<file path=ppt/slides/slide9.xml><?xml version="1.0" encoding="utf-8"?>
+<p:sld xmlns:a="http://schemas.openxmlformats.org/drawingml/2006/main" xmlns:p="http://schemas.openxmlformats.org/presentationml/2006/main" xmlns:r="http://schemas.openxmlformats.org/officeDocument/2006/relationships">
+  <p:cSld>
+    <p:spTree>
+      <p:nvGrpSpPr>
+        <p:cNvPr id="1" name=""/>
+        <p:cNvGrpSpPr/>
+        <p:nvPr/>
+      </p:nvGrpSpPr>
+      <p:grpSpPr/>
+      <p:sp>
+        <p:nvSpPr>
+          <p:cNvPr id="2" name="Vertical Title 1"/>
+          <p:cNvSpPr>
+            <a:spLocks noGrp="1"/>
+          </p:cNvSpPr>
+          <p:nvPr>
+            <p:ph type="title" orient="vert"/>
+          </p:nvPr>
+        </p:nvSpPr>
+        <p:spPr/>
+        <p:txBody>
+          <a:bodyPr/>
+          <a:lstStyle/>
+          <a:p/>
+        </p:txBody>
+      </p:sp>
+      <p:sp>
+        <p:nvSpPr>
+          <p:cNvPr id="3" name="Vertical Text Placeholder 2"/>
+          <p:cNvSpPr>
+            <a:spLocks noGrp="1"/>
+          </p:cNvSpPr>
+          <p:nvPr>
+            <p:ph type="body" idx="1" orient="vert"/>
+          </p:nvPr>
+        </p:nvSpPr>
+        <p:spPr/>
+        <p:txBody>
+          <a:bodyPr/>
+          <a:lstStyle/>
+          <a:p/>
+        </p:txBody>
+      </p:sp>
+      <p:sp>
+        <p:nvSpPr>
+          <p:cNvPr id="4" name="TextBox 3"/>
+          <p:cNvSpPr txBox="1"/>
+          <p:nvPr/>
+        </p:nvSpPr>
+        <p:spPr>
+          <a:xfrm>
+            <a:off x="640080" y="365760"/>
+            <a:ext cx="10972800" cy="502920"/>
+          </a:xfrm>
+          <a:prstGeom prst="rect">
+            <a:avLst/>
+          </a:prstGeom>
+          <a:noFill/>
+        </p:spPr>
+        <p:txBody>
+          <a:bodyPr wrap="square">
+            <a:spAutoFit/>
+          </a:bodyPr>
+          <a:lstStyle/>
+          <a:p>
+            <a:pPr algn="l"/>
+            <a:r>
+              <a:rPr sz="2800" b="1">
+                <a:solidFill>
+                  <a:srgbClr val="1B2B2D"/>
+                </a:solidFill>
+              </a:rPr>
+              <a:t>Revenue Model</a:t>
+            </a:r>
+          </a:p>
+        </p:txBody>
+      </p:sp>
+      <p:sp>
+        <p:nvSpPr>
+          <p:cNvPr id="5" name="TextBox 4"/>
+          <p:cNvSpPr txBox="1"/>
+          <p:nvPr/>
+        </p:nvSpPr>
+        <p:spPr>
+          <a:xfrm>
+            <a:off x="640080" y="868680"/>
+            <a:ext cx="10972800" cy="365760"/>
+          </a:xfrm>
+          <a:prstGeom prst="rect">
+            <a:avLst/>
+          </a:prstGeom>
+          <a:noFill/>
+        </p:spPr>
+        <p:txBody>
+          <a:bodyPr wrap="square">
+            <a:spAutoFit/>
+          </a:bodyPr>
+          <a:lstStyle/>
+          <a:p>
+            <a:pPr algn="l"/>
+            <a:r>
+              <a:rPr sz="1300" b="0">
+                <a:solidFill>
+                  <a:srgbClr val="5A6E70"/>
+                </a:solidFill>
+              </a:rPr>
+              <a:t>Landlords and agents pay to reach pre-qualified renters and buyers.</a:t>
+            </a:r>
+          </a:p>
+        </p:txBody>
+      </p:sp>
+      <p:sp>
+        <p:nvSpPr>
+          <p:cNvPr id="6" name="TextBox 5"/>
+          <p:cNvSpPr txBox="1"/>
+          <p:nvPr/>
+        </p:nvSpPr>
+        <p:spPr>
+          <a:xfrm>
+            <a:off x="640080" y="1417320"/>
+            <a:ext cx="5303520" cy="3291840"/>
+          </a:xfrm>
+          <a:prstGeom prst="rect">
+            <a:avLst/>
+          </a:prstGeom>
+          <a:noFill/>
+        </p:spPr>
+        <p:txBody>
+          <a:bodyPr wrap="square">
+            <a:spAutoFit/>
+          </a:bodyPr>
+          <a:lstStyle/>
+          <a:p>
+            <a:pPr>
+              <a:spcBef>
+                <a:spcPts val="500"/>
+              </a:spcBef>
+            </a:pPr>
+            <a:r>
+              <a:rPr sz="1200">
+                <a:solidFill>
+                  <a:srgbClr val="1B2B2D"/>
+                </a:solidFill>
+              </a:rPr>
+              <a:t>① Landlord or agent taps "List your property" on the login screen.</a:t>
+            </a:r>
+          </a:p>
+          <a:p>
+            <a:pPr>
+              <a:spcBef>
+                <a:spcPts val="500"/>
+              </a:spcBef>
+            </a:pPr>
+            <a:r>
+              <a:rPr sz="1200">
+                <a:solidFill>
+                  <a:srgbClr val="1B2B2D"/>
+                </a:solidFill>
+              </a:rPr>
+              <a:t>② They choose a subscription tier and create an account.</a:t>
+            </a:r>
+          </a:p>
+          <a:p>
+            <a:pPr>
+              <a:spcBef>
+                <a:spcPts val="500"/>
+              </a:spcBef>
+            </a:pPr>
+            <a:r>
+              <a:rPr sz="1200">
+                <a:solidFill>
+                  <a:srgbClr val="1B2B2D"/>
+                </a:solidFill>
+              </a:rPr>
+              <a:t>③ Their listings are posted alongside platform inventory and ranked by the AI.</a:t>
+            </a:r>
+          </a:p>
+          <a:p>
+            <a:pPr>
+              <a:spcBef>
+                <a:spcPts val="500"/>
+              </a:spcBef>
+            </a:pPr>
+            <a:r>
+              <a:rPr sz="1200">
+                <a:solidFill>
+                  <a:srgbClr val="1B2B2D"/>
+                </a:solidFill>
+              </a:rPr>
+              <a:t>④ Tenants and buyers see property photos, descriptions, and budget-fit scores.</a:t>
+            </a:r>
+          </a:p>
+          <a:p>
+            <a:pPr>
+              <a:spcBef>
+                <a:spcPts val="500"/>
+              </a:spcBef>
+            </a:pPr>
+            <a:r>
+              <a:rPr sz="1200">
+                <a:solidFill>
+                  <a:srgbClr val="1B2B2D"/>
+                </a:solidFill>
+              </a:rPr>
+              <a:t>⑤ Landlords get direct exposure to the most financially qualified users.</a:t>
+            </a:r>
+          </a:p>
+        </p:txBody>
+      </p:sp>
+      <p:sp>
+        <p:nvSpPr>
+          <p:cNvPr id="7" name="Rectangle 6"/>
+          <p:cNvSpPr/>
+          <p:nvPr/>
+        </p:nvSpPr>
+        <p:spPr>
+          <a:xfrm>
+            <a:off x="6583680" y="1417320"/>
+            <a:ext cx="4389120" cy="777240"/>
+          </a:xfrm>
+          <a:prstGeom prst="rect">
+            <a:avLst/>
+          </a:prstGeom>
+          <a:solidFill>
+            <a:srgbClr val="E1EFE9"/>
+          </a:solidFill>
+          <a:ln>
+            <a:noFill/>
+          </a:ln>
+          <a:prstGeom prst="roundRect">
+            <a:avLst/>
+          </a:prstGeom>
+        </p:spPr>
+        <p:style>
+          <a:lnRef idx="1">
+            <a:schemeClr val="accent1"/>
+          </a:lnRef>
+          <a:fillRef idx="3">
+            <a:schemeClr val="accent1"/>
+          </a:fillRef>
+          <a:effectRef idx="2">
+            <a:schemeClr val="accent1"/>
+          </a:effectRef>
+          <a:fontRef idx="minor">
+            <a:schemeClr val="lt1"/>
+          </a:fontRef>
+        </p:style>
+        <p:txBody>
+          <a:bodyPr rtlCol="0" anchor="ctr" wrap="square" lIns="128016" tIns="91440"/>
+          <a:lstStyle/>
+          <a:p>
+            <a:pPr algn="l"/>
+            <a:r>
+              <a:rPr sz="1300" b="1">
+                <a:solidFill>
+                  <a:srgbClr val="1B2B2D"/>
+                </a:solidFill>
+              </a:rPr>
+              <a:t>Free Trial  </a:t>
+            </a:r>
+            <a:r>
+              <a:rPr sz="1300" b="0">
+                <a:solidFill>
+                  <a:srgbClr val="1B2B2D"/>
+                </a:solidFill>
+              </a:rPr>
+              <a:t>$0</a:t>
+            </a:r>
+          </a:p>
+          <a:p>
+            <a:pPr algn="l">
+              <a:spcBef>
+                <a:spcPts val="200"/>
+              </a:spcBef>
+            </a:pPr>
+            <a:r>
+              <a:rPr sz="1000">
+                <a:solidFill>
+                  <a:srgbClr val="1B2B2D"/>
+                </a:solidFill>
+              </a:rPr>
+              <a:t>1 listing · 30 days</a:t>
+            </a:r>
+          </a:p>
+        </p:txBody>
+      </p:sp>
+      <p:sp>
+        <p:nvSpPr>
+          <p:cNvPr id="8" name="Rectangle 7"/>
+          <p:cNvSpPr/>
+          <p:nvPr/>
+        </p:nvSpPr>
+        <p:spPr>
+          <a:xfrm>
+            <a:off x="6583680" y="2359152"/>
+            <a:ext cx="4389120" cy="777240"/>
+          </a:xfrm>
+          <a:prstGeom prst="rect">
+            <a:avLst/>
+          </a:prstGeom>
+          <a:solidFill>
+            <a:srgbClr val="2A9D8F"/>
+          </a:solidFill>
+          <a:ln>
+            <a:noFill/>
+          </a:ln>
+          <a:prstGeom prst="roundRect">
+            <a:avLst/>
+          </a:prstGeom>
+        </p:spPr>
+        <p:style>
+          <a:lnRef idx="1">
+            <a:schemeClr val="accent1"/>
+          </a:lnRef>
+          <a:fillRef idx="3">
+            <a:schemeClr val="accent1"/>
+          </a:fillRef>
+          <a:effectRef idx="2">
+            <a:schemeClr val="accent1"/>
+          </a:effectRef>
+          <a:fontRef idx="minor">
+            <a:schemeClr val="lt1"/>
+          </a:fontRef>
+        </p:style>
+        <p:txBody>
+          <a:bodyPr rtlCol="0" anchor="ctr" wrap="square" lIns="128016" tIns="91440"/>
+          <a:lstStyle/>
+          <a:p>
+            <a:pPr algn="l"/>
+            <a:r>
+              <a:rPr sz="1300" b="1">
+                <a:solidFill>
+                  <a:srgbClr val="FFFFFF"/>
+                </a:solidFill>
+              </a:rPr>
+              <a:t>Basic  </a:t>
+            </a:r>
+            <a:r>
+              <a:rPr sz="1300" b="0">
+                <a:solidFill>
+                  <a:srgbClr val="FFFFFF"/>
+                </a:solidFill>
+              </a:rPr>
+              <a:t>$29 / mo</a:t>
+            </a:r>
+          </a:p>
+          <a:p>
+            <a:pPr algn="l">
+              <a:spcBef>
+                <a:spcPts val="200"/>
+              </a:spcBef>
+            </a:pPr>
+            <a:r>
+              <a:rPr sz="1000">
+                <a:solidFill>
+                  <a:srgbClr val="FFFFFF"/>
+                </a:solidFill>
+              </a:rPr>
+              <a:t>Up to 5 listings</a:t>
+            </a:r>
+          </a:p>
+        </p:txBody>
+      </p:sp>
+      <p:sp>
+        <p:nvSpPr>
+          <p:cNvPr id="9" name="Rectangle 8"/>
+          <p:cNvSpPr/>
+          <p:nvPr/>
+        </p:nvSpPr>
+        <p:spPr>
+          <a:xfrm>
+            <a:off x="6583680" y="3300984"/>
+            <a:ext cx="4389120" cy="777240"/>
+          </a:xfrm>
+          <a:prstGeom prst="rect">
+            <a:avLst/>
+          </a:prstGeom>
+          <a:solidFill>
+            <a:srgbClr val="1B2B2D"/>
+          </a:solidFill>
+          <a:ln>
+            <a:noFill/>
+          </a:ln>
+          <a:prstGeom prst="roundRect">
+            <a:avLst/>
+          </a:prstGeom>
+        </p:spPr>
+        <p:style>
+          <a:lnRef idx="1">
+            <a:schemeClr val="accent1"/>
+          </a:lnRef>
+          <a:fillRef idx="3">
+            <a:schemeClr val="accent1"/>
+          </a:fillRef>
+          <a:effectRef idx="2">
+            <a:schemeClr val="accent1"/>
+          </a:effectRef>
+          <a:fontRef idx="minor">
+            <a:schemeClr val="lt1"/>
+          </a:fontRef>
+        </p:style>
+        <p:txBody>
+          <a:bodyPr rtlCol="0" anchor="ctr" wrap="square" lIns="128016" tIns="91440"/>
+          <a:lstStyle/>
+          <a:p>
+            <a:pPr algn="l"/>
+            <a:r>
+              <a:rPr sz="1300" b="1">
+                <a:solidFill>
+                  <a:srgbClr val="FFFFFF"/>
+                </a:solidFill>
+              </a:rPr>
+              <a:t>Premium  </a:t>
+            </a:r>
+            <a:r>
+              <a:rPr sz="1300" b="0">
+                <a:solidFill>
+                  <a:srgbClr val="FFFFFF"/>
+                </a:solidFill>
+              </a:rPr>
+              <a:t>$79 / mo</a:t>
+            </a:r>
+          </a:p>
+          <a:p>
+            <a:pPr algn="l">
+              <a:spcBef>
+                <a:spcPts val="200"/>
+              </a:spcBef>
+            </a:pPr>
+            <a:r>
+              <a:rPr sz="1000">
+                <a:solidFill>
+                  <a:srgbClr val="FFFFFF"/>
+                </a:solidFill>
+              </a:rPr>
+              <a:t>Unlimited + featured placement</a:t>
+            </a:r>
+          </a:p>
+        </p:txBody>
+      </p:sp>
+      <p:sp>
+        <p:nvSpPr>
+          <p:cNvPr id="10" name="Rectangle 9"/>
+          <p:cNvSpPr/>
+          <p:nvPr/>
+        </p:nvSpPr>
+        <p:spPr>
+          <a:xfrm>
+            <a:off x="640080" y="4937760"/>
+            <a:ext cx="10881360" cy="685800"/>
+          </a:xfrm>
+          <a:prstGeom prst="rect">
+            <a:avLst/>
+          </a:prstGeom>
+          <a:solidFill>
+            <a:srgbClr val="E1EFE9"/>
+          </a:solidFill>
+          <a:ln>
+            <a:noFill/>
+          </a:ln>
+          <a:prstGeom prst="roundRect">
+            <a:avLst/>
+          </a:prstGeom>
+        </p:spPr>
+        <p:style>
+          <a:lnRef idx="1">
+            <a:schemeClr val="accent1"/>
+          </a:lnRef>
+          <a:fillRef idx="3">
+            <a:schemeClr val="accent1"/>
+          </a:fillRef>
+          <a:effectRef idx="2">
+            <a:schemeClr val="accent1"/>
+          </a:effectRef>
+          <a:fontRef idx="minor">
+            <a:schemeClr val="lt1"/>
+          </a:fontRef>
+        </p:style>
+        <p:txBody>
+          <a:bodyPr rtlCol="0" anchor="ctr" wrap="square"/>
+          <a:lstStyle/>
+          <a:p>
+            <a:pPr algn="ctr"/>
+            <a:r>
+              <a:rPr sz="1200" b="1">
+                <a:solidFill>
+                  <a:srgbClr val="1B2B2D"/>
+                </a:solidFill>
+              </a:rPr>
+              <a:t>Demo landlord account: landlord@homepilot.ai / Landlord123! — Basic tier, "Peach State Properties"</a:t>
             </a:r>
           </a:p>
         </p:txBody>
